--- a/docs/KSL-LLM-IoT_Slides.pptx
+++ b/docs/KSL-LLM-IoT_Slides.pptx
@@ -2679,7 +2679,7 @@
                 <a:ea typeface="Calibri" pitchFamily="34" charset="-122"/>
                 <a:cs typeface="Calibri" pitchFamily="34" charset="-120"/>
               </a:rPr>
-              <a:t>Word buffer → Gemini 2.5 Flash with a persona system prompt</a:t>
+              <a:t>Word buffer → Gemini 2.5 Flash with a persona system prompt (polite / friendly = casual)</a:t>
             </a:r>
             <a:pPr algn="l" marL="228600" indent="-228600">
               <a:spcAft>
@@ -2697,7 +2697,7 @@
                 <a:ea typeface="Calibri" pitchFamily="34" charset="-122"/>
                 <a:cs typeface="Calibri" pitchFamily="34" charset="-120"/>
               </a:rPr>
-              <a:t>Persona: polite / friendly / brief</a:t>
+              <a:t>One call generates BOTH personas and caches them — persona switch / re-press = 0 extra calls</a:t>
             </a:r>
             <a:pPr algn="l" marL="228600" indent="-228600">
               <a:spcAft>
@@ -2945,7 +2945,7 @@
                 <a:ea typeface="Calibri" pitchFamily="34" charset="-122"/>
                 <a:cs typeface="Calibri" pitchFamily="34" charset="-120"/>
               </a:rPr>
-              <a:t>USB webcam, I2C LCD 20×4, active buzzer, 4 push buttons</a:t>
+              <a:t>USB webcam, I2C LCD 20×4, active buzzer, status LED (GPIO22), 4 push buttons (complete + undo + 2 personas)</a:t>
             </a:r>
             <a:pPr algn="l" marL="228600" indent="-228600">
               <a:spcAft>
@@ -2963,7 +2963,7 @@
                 <a:ea typeface="Calibri" pitchFamily="34" charset="-122"/>
                 <a:cs typeface="Calibri" pitchFamily="34" charset="-120"/>
               </a:rPr>
-              <a:t>Buttons = complete + 3 personas; internal pull-ups to GND (no resistors)</a:t>
+              <a:t>Internal pull-ups to GND (no external resistors)</a:t>
             </a:r>
             <a:pPr algn="l" marL="228600" indent="-228600">
               <a:spcAft>
@@ -2981,7 +2981,7 @@
                 <a:ea typeface="Calibri" pitchFamily="34" charset="-122"/>
                 <a:cs typeface="Calibri" pitchFamily="34" charset="-120"/>
               </a:rPr>
-              <a:t>Beep 1 / 2 / 3 times = non-visual persona confirmation</a:t>
+              <a:t>Buzzer + LED blink in sync (1 / 2×) = persona confirmation — the LED gives deaf / HoH users the cue visually</a:t>
             </a:r>
             <a:pPr algn="l" marL="228600" indent="-228600">
               <a:spcAft>
@@ -2999,7 +2999,25 @@
                 <a:ea typeface="Calibri" pitchFamily="34" charset="-122"/>
                 <a:cs typeface="Calibri" pitchFamily="34" charset="-120"/>
               </a:rPr>
-              <a:t>Designed for deaf / hard-of-hearing users who cannot rely on audio cues</a:t>
+              <a:t>Sentence complete = single long beep+LED (vs short per-word); persona switch / re-press = replay cached sentence</a:t>
+            </a:r>
+            <a:pPr algn="l" marL="228600" indent="-228600">
+              <a:spcAft>
+                <a:spcPts val="1000"/>
+              </a:spcAft>
+              <a:buSzPct val="100000"/>
+              <a:buChar char="•"/>
+            </a:pPr>
+            <a:r>
+              <a:rPr lang="en-US" sz="1700" dirty="0">
+                <a:solidFill>
+                  <a:srgbClr val="222B45"/>
+                </a:solidFill>
+                <a:latin typeface="Calibri" pitchFamily="34" charset="0"/>
+                <a:ea typeface="Calibri" pitchFamily="34" charset="-122"/>
+                <a:cs typeface="Calibri" pitchFamily="34" charset="-120"/>
+              </a:rPr>
+              <a:t>Undo button: remove last word (while entering) or re-generate the sentence (after output)</a:t>
             </a:r>
             <a:endParaRPr lang="en-US" sz="1700" dirty="0"/>
           </a:p>
@@ -3748,7 +3766,7 @@
                 <a:ea typeface="Georgia" pitchFamily="34" charset="-122"/>
                 <a:cs typeface="Georgia" pitchFamily="34" charset="-120"/>
               </a:rPr>
-              <a:t>0.94</a:t>
+              <a:t>0.72</a:t>
             </a:r>
             <a:endParaRPr lang="en-US" sz="4400" dirty="0"/>
           </a:p>
@@ -4339,7 +4357,7 @@
                 <a:ea typeface="Georgia" pitchFamily="34" charset="-122"/>
                 <a:cs typeface="Georgia" pitchFamily="34" charset="-120"/>
               </a:rPr>
-              <a:t>Evaluation Integrity — Keras vs TFLite</a:t>
+              <a:t>Evaluation Integrity — we found &amp; fixed our own eval bug</a:t>
             </a:r>
             <a:endParaRPr lang="en-US" sz="3000" dirty="0"/>
           </a:p>
@@ -4382,7 +4400,7 @@
                 <a:ea typeface="Calibri" pitchFamily="34" charset="-122"/>
                 <a:cs typeface="Calibri" pitchFamily="34" charset="-120"/>
               </a:rPr>
-              <a:t>Same 2,595 inputs: Keras 0.71 (CPU = GPU) vs deployed TFLite 0.94</a:t>
+              <a:t>Earlier eval showed 0.94 vs Keras 0.71 on the same 2,595 inputs — too good to be true</a:t>
             </a:r>
             <a:pPr algn="l" marL="228600" indent="-228600">
               <a:spcAft>
@@ -4400,7 +4418,7 @@
                 <a:ea typeface="Calibri" pitchFamily="34" charset="-122"/>
                 <a:cs typeface="Calibri" pitchFamily="34" charset="-120"/>
               </a:rPr>
-              <a:t>Models disagree on 30% of samples</a:t>
+              <a:t>Root cause: TFLite LSTM state NOT reset between samples + label-sorted holdout → same-label carryover</a:t>
             </a:r>
             <a:pPr algn="l" marL="228600" indent="-228600">
               <a:spcAft>
@@ -4418,7 +4436,7 @@
                 <a:ea typeface="Calibri" pitchFamily="34" charset="-122"/>
                 <a:cs typeface="Calibri" pitchFamily="34" charset="-120"/>
               </a:rPr>
-              <a:t>On those disagreements: TFLite correct 650 vs Keras 59</a:t>
+              <a:t>Fix (reset_all_variables() per inference): TFLite == Keras == 0.7168 (shuffle-leaked = 0.45 confirms)</a:t>
             </a:r>
             <a:pPr algn="l" marL="228600" indent="-228600">
               <a:spcAft>
@@ -4436,7 +4454,7 @@
                 <a:ea typeface="Calibri" pitchFamily="34" charset="-122"/>
                 <a:cs typeface="Calibri" pitchFamily="34" charset="-120"/>
               </a:rPr>
-              <a:t>RPi runs the TFLite file → 0.94 is the faithful deployed number (reported with caveats)</a:t>
+              <a:t>Corrected on-device path too → 0.72 is the honest deployed number</a:t>
             </a:r>
             <a:endParaRPr lang="en-US" sz="1700" dirty="0"/>
           </a:p>
@@ -5701,7 +5719,7 @@
                 <a:ea typeface="Calibri" pitchFamily="34" charset="-122"/>
                 <a:cs typeface="Calibri" pitchFamily="34" charset="-120"/>
               </a:rPr>
-              <a:t>→ word buffer → [button | 완료 sign | 3 s silence] → Gemini 2.5 Flash</a:t>
+              <a:t>→ word buffer → [complete button | 완료 sign] → Gemini 2.5 Flash</a:t>
             </a:r>
             <a:pPr algn="l" marL="228600" indent="-228600">
               <a:spcAft>
@@ -6003,7 +6021,7 @@
                 <a:ea typeface="Calibri" pitchFamily="34" charset="-122"/>
                 <a:cs typeface="Calibri" pitchFamily="34" charset="-120"/>
               </a:rPr>
-              <a:t>Hardware layer — Raspberry Pi 4B, camera, GPIO buttons, buzzer</a:t>
+              <a:t>Hardware layer — Raspberry Pi 4B, camera, GPIO buttons, buzzer, status LED</a:t>
             </a:r>
             <a:endParaRPr lang="en-US" sz="1700" dirty="0"/>
           </a:p>
